--- a/docs/toss-review/결제경로_글로케어.pptx
+++ b/docs/toss-review/결제경로_글로케어.pptx
@@ -309,13 +309,13 @@
             <a:r>
               <a:rPr lang="ko-KR" altLang="en-US" sz="1500" dirty="0">
                 <a:solidFill>
-                  <a:srgbClr val="D93B3B"/>
-                </a:solidFill>
-                <a:latin typeface="맑은 고딕"/>
-                <a:ea typeface="맑은 고딕"/>
-                <a:cs typeface="맑은 고딕"/>
-              </a:rPr>
-              <a:t>(통신판매업신고번호 발급 후 기재)</a:t>
+                  <a:srgbClr val="5B6472"/>
+                </a:solidFill>
+                <a:latin typeface="맑은 고딕"/>
+                <a:ea typeface="맑은 고딕"/>
+                <a:cs typeface="맑은 고딕"/>
+              </a:rPr>
+              <a:t>신고 예정 (구매안전서비스 이용확인증 발급 후 신고)</a:t>
             </a:r>
           </a:p>
           <a:p>
@@ -750,7 +750,7 @@
                 <a:ea typeface="맑은 고딕"/>
                 <a:cs typeface="맑은 고딕"/>
               </a:rPr>
-              <a:t>· 통신판매업신고번호가 '준비 중'이면 심사 반려 — 번호 발급 후 캡처</a:t>
+              <a:t>· 통신판매업신고번호는 '준비 중'으로 표시 — 구매안전서비스 이용확인증 발급 후 신고 예정</a:t>
             </a:r>
           </a:p>
           <a:p>

--- a/docs/toss-review/결제경로_글로케어.pptx
+++ b/docs/toss-review/결제경로_글로케어.pptx
@@ -641,162 +641,35 @@
           </a:p>
         </p:txBody>
       </p:sp>
-      <p:sp>
-        <p:nvSpPr>
-          <p:cNvPr id="4" name="sp4"/>
-          <p:cNvSpPr txBox="1"/>
-          <p:nvPr/>
-        </p:nvSpPr>
-        <p:spPr>
-          <a:xfrm>
-            <a:off x="640080" y="1298448"/>
-            <a:ext cx="10908792" cy="5212080"/>
-          </a:xfrm>
-          <a:prstGeom prst="rect">
-            <a:avLst/>
-          </a:prstGeom>
-          <a:solidFill>
-            <a:srgbClr val="F3F5F8"/>
-          </a:solidFill>
-          <a:ln w="12700">
+      <p:pic>
+        <p:nvPicPr>
+          <p:cNvPr id="4" name="pic4"/>
+          <p:cNvPicPr>
+            <a:picLocks noChangeAspect="1"/>
+          </p:cNvPicPr>
+          <p:nvPr/>
+        </p:nvPicPr>
+        <p:blipFill>
+          <a:blip r:embed="rId2"/>
+          <a:stretch>
+            <a:fillRect/>
+          </a:stretch>
+        </p:blipFill>
+        <p:spPr>
+          <a:xfrm>
+            <a:off x="1461516" y="1298448"/>
+            <a:ext cx="9265920" cy="5212080"/>
+          </a:xfrm>
+          <a:prstGeom prst="rect">
+            <a:avLst/>
+          </a:prstGeom>
+          <a:ln w="9525">
             <a:solidFill>
               <a:srgbClr val="C9CED6"/>
             </a:solidFill>
           </a:ln>
         </p:spPr>
-        <p:txBody>
-          <a:bodyPr wrap="square" lIns="91440" tIns="91440" rIns="91440" bIns="91440" anchor="ctr">
-            <a:normAutofit/>
-          </a:bodyPr>
-          <a:lstStyle/>
-          <a:p>
-            <a:pPr algn="ctr"/>
-            <a:r>
-              <a:rPr lang="ko-KR" altLang="en-US" sz="2000" b="1" dirty="0">
-                <a:solidFill>
-                  <a:srgbClr val="D93B3B"/>
-                </a:solidFill>
-                <a:latin typeface="맑은 고딕"/>
-                <a:ea typeface="맑은 고딕"/>
-                <a:cs typeface="맑은 고딕"/>
-              </a:rPr>
-              <a:t>캡처 필요</a:t>
-            </a:r>
-          </a:p>
-          <a:p>
-            <a:pPr algn="ctr"/>
-            <a:r>
-              <a:rPr lang="ko-KR" altLang="en-US" sz="800" dirty="0">
-                <a:solidFill>
-                  <a:srgbClr val="1A1D21"/>
-                </a:solidFill>
-                <a:latin typeface="맑은 고딕"/>
-                <a:ea typeface="맑은 고딕"/>
-                <a:cs typeface="맑은 고딕"/>
-              </a:rPr>
-              <a:t/>
-            </a:r>
-          </a:p>
-          <a:p>
-            <a:pPr algn="ctr"/>
-            <a:r>
-              <a:rPr lang="ko-KR" altLang="en-US" sz="1300" dirty="0">
-                <a:solidFill>
-                  <a:srgbClr val="1A1D21"/>
-                </a:solidFill>
-                <a:latin typeface="맑은 고딕"/>
-                <a:ea typeface="맑은 고딕"/>
-                <a:cs typeface="맑은 고딕"/>
-              </a:rPr>
-              <a:t>주소 : https://www.youstudyinkorea.com/  (페이지 맨 아래 사업자 정보 영역)</a:t>
-            </a:r>
-          </a:p>
-          <a:p>
-            <a:pPr algn="ctr"/>
-            <a:r>
-              <a:rPr lang="ko-KR" altLang="en-US" sz="600" dirty="0">
-                <a:solidFill>
-                  <a:srgbClr val="1A1D21"/>
-                </a:solidFill>
-                <a:latin typeface="맑은 고딕"/>
-                <a:ea typeface="맑은 고딕"/>
-                <a:cs typeface="맑은 고딕"/>
-              </a:rPr>
-              <a:t/>
-            </a:r>
-          </a:p>
-          <a:p>
-            <a:pPr algn="ctr"/>
-            <a:r>
-              <a:rPr lang="ko-KR" altLang="en-US" sz="1200" dirty="0">
-                <a:solidFill>
-                  <a:srgbClr val="5B6472"/>
-                </a:solidFill>
-                <a:latin typeface="맑은 고딕"/>
-                <a:ea typeface="맑은 고딕"/>
-                <a:cs typeface="맑은 고딕"/>
-              </a:rPr>
-              <a:t>· 사업자등록증과 같은 값이 모두 보일 것</a:t>
-            </a:r>
-          </a:p>
-          <a:p>
-            <a:pPr algn="ctr"/>
-            <a:r>
-              <a:rPr lang="ko-KR" altLang="en-US" sz="1200" dirty="0">
-                <a:solidFill>
-                  <a:srgbClr val="5B6472"/>
-                </a:solidFill>
-                <a:latin typeface="맑은 고딕"/>
-                <a:ea typeface="맑은 고딕"/>
-                <a:cs typeface="맑은 고딕"/>
-              </a:rPr>
-              <a:t>· 통신판매업신고번호는 '준비 중'으로 표시 — 구매안전서비스 이용확인증 발급 후 신고 예정</a:t>
-            </a:r>
-          </a:p>
-          <a:p>
-            <a:pPr algn="ctr"/>
-            <a:r>
-              <a:rPr lang="ko-KR" altLang="en-US" sz="800" dirty="0">
-                <a:solidFill>
-                  <a:srgbClr val="1A1D21"/>
-                </a:solidFill>
-                <a:latin typeface="맑은 고딕"/>
-                <a:ea typeface="맑은 고딕"/>
-                <a:cs typeface="맑은 고딕"/>
-              </a:rPr>
-              <a:t/>
-            </a:r>
-          </a:p>
-          <a:p>
-            <a:pPr algn="ctr"/>
-            <a:r>
-              <a:rPr lang="ko-KR" altLang="en-US" sz="1100" dirty="0">
-                <a:solidFill>
-                  <a:srgbClr val="5B6472"/>
-                </a:solidFill>
-                <a:latin typeface="맑은 고딕"/>
-                <a:ea typeface="맑은 고딕"/>
-                <a:cs typeface="맑은 고딕"/>
-              </a:rPr>
-              <a:t>공통 규칙 : 북마크바 숨김 · 주소창에 도메인 노출 · 작업표시줄 시계 함께</a:t>
-            </a:r>
-          </a:p>
-          <a:p>
-            <a:pPr algn="ctr"/>
-            <a:r>
-              <a:rPr lang="ko-KR" altLang="en-US" sz="1100" dirty="0">
-                <a:solidFill>
-                  <a:srgbClr val="5B6472"/>
-                </a:solidFill>
-                <a:latin typeface="맑은 고딕"/>
-                <a:ea typeface="맑은 고딕"/>
-                <a:cs typeface="맑은 고딕"/>
-              </a:rPr>
-              <a:t>파일 저장 위치 : docs/toss-review/shots/02_footer.png</a:t>
-            </a:r>
-          </a:p>
-        </p:txBody>
-      </p:sp>
+      </p:pic>
     </p:spTree>
   </p:cSld>
   <p:clrMapOvr>
@@ -904,148 +777,35 @@
           </a:p>
         </p:txBody>
       </p:sp>
-      <p:sp>
-        <p:nvSpPr>
-          <p:cNvPr id="4" name="sp4"/>
-          <p:cNvSpPr txBox="1"/>
-          <p:nvPr/>
-        </p:nvSpPr>
-        <p:spPr>
-          <a:xfrm>
-            <a:off x="640080" y="1298448"/>
-            <a:ext cx="10908792" cy="5212080"/>
-          </a:xfrm>
-          <a:prstGeom prst="rect">
-            <a:avLst/>
-          </a:prstGeom>
-          <a:solidFill>
-            <a:srgbClr val="F3F5F8"/>
-          </a:solidFill>
-          <a:ln w="12700">
+      <p:pic>
+        <p:nvPicPr>
+          <p:cNvPr id="4" name="pic4"/>
+          <p:cNvPicPr>
+            <a:picLocks noChangeAspect="1"/>
+          </p:cNvPicPr>
+          <p:nvPr/>
+        </p:nvPicPr>
+        <p:blipFill>
+          <a:blip r:embed="rId2"/>
+          <a:stretch>
+            <a:fillRect/>
+          </a:stretch>
+        </p:blipFill>
+        <p:spPr>
+          <a:xfrm>
+            <a:off x="1461516" y="1298448"/>
+            <a:ext cx="9265920" cy="5212080"/>
+          </a:xfrm>
+          <a:prstGeom prst="rect">
+            <a:avLst/>
+          </a:prstGeom>
+          <a:ln w="9525">
             <a:solidFill>
               <a:srgbClr val="C9CED6"/>
             </a:solidFill>
           </a:ln>
         </p:spPr>
-        <p:txBody>
-          <a:bodyPr wrap="square" lIns="91440" tIns="91440" rIns="91440" bIns="91440" anchor="ctr">
-            <a:normAutofit/>
-          </a:bodyPr>
-          <a:lstStyle/>
-          <a:p>
-            <a:pPr algn="ctr"/>
-            <a:r>
-              <a:rPr lang="ko-KR" altLang="en-US" sz="2000" b="1" dirty="0">
-                <a:solidFill>
-                  <a:srgbClr val="D93B3B"/>
-                </a:solidFill>
-                <a:latin typeface="맑은 고딕"/>
-                <a:ea typeface="맑은 고딕"/>
-                <a:cs typeface="맑은 고딕"/>
-              </a:rPr>
-              <a:t>캡처 필요</a:t>
-            </a:r>
-          </a:p>
-          <a:p>
-            <a:pPr algn="ctr"/>
-            <a:r>
-              <a:rPr lang="ko-KR" altLang="en-US" sz="800" dirty="0">
-                <a:solidFill>
-                  <a:srgbClr val="1A1D21"/>
-                </a:solidFill>
-                <a:latin typeface="맑은 고딕"/>
-                <a:ea typeface="맑은 고딕"/>
-                <a:cs typeface="맑은 고딕"/>
-              </a:rPr>
-              <a:t/>
-            </a:r>
-          </a:p>
-          <a:p>
-            <a:pPr algn="ctr"/>
-            <a:r>
-              <a:rPr lang="ko-KR" altLang="en-US" sz="1300" dirty="0">
-                <a:solidFill>
-                  <a:srgbClr val="1A1D21"/>
-                </a:solidFill>
-                <a:latin typeface="맑은 고딕"/>
-                <a:ea typeface="맑은 고딕"/>
-                <a:cs typeface="맑은 고딕"/>
-              </a:rPr>
-              <a:t>주소 : https://www.youstudyinkorea.com/refund</a:t>
-            </a:r>
-          </a:p>
-          <a:p>
-            <a:pPr algn="ctr"/>
-            <a:r>
-              <a:rPr lang="ko-KR" altLang="en-US" sz="600" dirty="0">
-                <a:solidFill>
-                  <a:srgbClr val="1A1D21"/>
-                </a:solidFill>
-                <a:latin typeface="맑은 고딕"/>
-                <a:ea typeface="맑은 고딕"/>
-                <a:cs typeface="맑은 고딕"/>
-              </a:rPr>
-              <a:t/>
-            </a:r>
-          </a:p>
-          <a:p>
-            <a:pPr algn="ctr"/>
-            <a:r>
-              <a:rPr lang="ko-KR" altLang="en-US" sz="1200" dirty="0">
-                <a:solidFill>
-                  <a:srgbClr val="5B6472"/>
-                </a:solidFill>
-                <a:latin typeface="맑은 고딕"/>
-                <a:ea typeface="맑은 고딕"/>
-                <a:cs typeface="맑은 고딕"/>
-              </a:rPr>
-              <a:t>· 환불 기준·비율·청약철회 조항이 화면에 보일 것</a:t>
-            </a:r>
-          </a:p>
-          <a:p>
-            <a:pPr algn="ctr"/>
-            <a:r>
-              <a:rPr lang="ko-KR" altLang="en-US" sz="800" dirty="0">
-                <a:solidFill>
-                  <a:srgbClr val="1A1D21"/>
-                </a:solidFill>
-                <a:latin typeface="맑은 고딕"/>
-                <a:ea typeface="맑은 고딕"/>
-                <a:cs typeface="맑은 고딕"/>
-              </a:rPr>
-              <a:t/>
-            </a:r>
-          </a:p>
-          <a:p>
-            <a:pPr algn="ctr"/>
-            <a:r>
-              <a:rPr lang="ko-KR" altLang="en-US" sz="1100" dirty="0">
-                <a:solidFill>
-                  <a:srgbClr val="5B6472"/>
-                </a:solidFill>
-                <a:latin typeface="맑은 고딕"/>
-                <a:ea typeface="맑은 고딕"/>
-                <a:cs typeface="맑은 고딕"/>
-              </a:rPr>
-              <a:t>공통 규칙 : 북마크바 숨김 · 주소창에 도메인 노출 · 작업표시줄 시계 함께</a:t>
-            </a:r>
-          </a:p>
-          <a:p>
-            <a:pPr algn="ctr"/>
-            <a:r>
-              <a:rPr lang="ko-KR" altLang="en-US" sz="1100" dirty="0">
-                <a:solidFill>
-                  <a:srgbClr val="5B6472"/>
-                </a:solidFill>
-                <a:latin typeface="맑은 고딕"/>
-                <a:ea typeface="맑은 고딕"/>
-                <a:cs typeface="맑은 고딕"/>
-              </a:rPr>
-              <a:t>파일 저장 위치 : docs/toss-review/shots/03_refund.png</a:t>
-            </a:r>
-          </a:p>
-        </p:txBody>
-      </p:sp>
+      </p:pic>
     </p:spTree>
   </p:cSld>
   <p:clrMapOvr>
@@ -1153,148 +913,35 @@
           </a:p>
         </p:txBody>
       </p:sp>
-      <p:sp>
-        <p:nvSpPr>
-          <p:cNvPr id="4" name="sp4"/>
-          <p:cNvSpPr txBox="1"/>
-          <p:nvPr/>
-        </p:nvSpPr>
-        <p:spPr>
-          <a:xfrm>
-            <a:off x="640080" y="1298448"/>
-            <a:ext cx="10908792" cy="5212080"/>
-          </a:xfrm>
-          <a:prstGeom prst="rect">
-            <a:avLst/>
-          </a:prstGeom>
-          <a:solidFill>
-            <a:srgbClr val="F3F5F8"/>
-          </a:solidFill>
-          <a:ln w="12700">
+      <p:pic>
+        <p:nvPicPr>
+          <p:cNvPr id="4" name="pic4"/>
+          <p:cNvPicPr>
+            <a:picLocks noChangeAspect="1"/>
+          </p:cNvPicPr>
+          <p:nvPr/>
+        </p:nvPicPr>
+        <p:blipFill>
+          <a:blip r:embed="rId2"/>
+          <a:stretch>
+            <a:fillRect/>
+          </a:stretch>
+        </p:blipFill>
+        <p:spPr>
+          <a:xfrm>
+            <a:off x="1461516" y="1298448"/>
+            <a:ext cx="9265920" cy="5212080"/>
+          </a:xfrm>
+          <a:prstGeom prst="rect">
+            <a:avLst/>
+          </a:prstGeom>
+          <a:ln w="9525">
             <a:solidFill>
               <a:srgbClr val="C9CED6"/>
             </a:solidFill>
           </a:ln>
         </p:spPr>
-        <p:txBody>
-          <a:bodyPr wrap="square" lIns="91440" tIns="91440" rIns="91440" bIns="91440" anchor="ctr">
-            <a:normAutofit/>
-          </a:bodyPr>
-          <a:lstStyle/>
-          <a:p>
-            <a:pPr algn="ctr"/>
-            <a:r>
-              <a:rPr lang="ko-KR" altLang="en-US" sz="2000" b="1" dirty="0">
-                <a:solidFill>
-                  <a:srgbClr val="D93B3B"/>
-                </a:solidFill>
-                <a:latin typeface="맑은 고딕"/>
-                <a:ea typeface="맑은 고딕"/>
-                <a:cs typeface="맑은 고딕"/>
-              </a:rPr>
-              <a:t>캡처 필요</a:t>
-            </a:r>
-          </a:p>
-          <a:p>
-            <a:pPr algn="ctr"/>
-            <a:r>
-              <a:rPr lang="ko-KR" altLang="en-US" sz="800" dirty="0">
-                <a:solidFill>
-                  <a:srgbClr val="1A1D21"/>
-                </a:solidFill>
-                <a:latin typeface="맑은 고딕"/>
-                <a:ea typeface="맑은 고딕"/>
-                <a:cs typeface="맑은 고딕"/>
-              </a:rPr>
-              <a:t/>
-            </a:r>
-          </a:p>
-          <a:p>
-            <a:pPr algn="ctr"/>
-            <a:r>
-              <a:rPr lang="ko-KR" altLang="en-US" sz="1300" dirty="0">
-                <a:solidFill>
-                  <a:srgbClr val="1A1D21"/>
-                </a:solidFill>
-                <a:latin typeface="맑은 고딕"/>
-                <a:ea typeface="맑은 고딕"/>
-                <a:cs typeface="맑은 고딕"/>
-              </a:rPr>
-              <a:t>주소 : https://www.youstudyinkorea.com/student/login</a:t>
-            </a:r>
-          </a:p>
-          <a:p>
-            <a:pPr algn="ctr"/>
-            <a:r>
-              <a:rPr lang="ko-KR" altLang="en-US" sz="600" dirty="0">
-                <a:solidFill>
-                  <a:srgbClr val="1A1D21"/>
-                </a:solidFill>
-                <a:latin typeface="맑은 고딕"/>
-                <a:ea typeface="맑은 고딕"/>
-                <a:cs typeface="맑은 고딕"/>
-              </a:rPr>
-              <a:t/>
-            </a:r>
-          </a:p>
-          <a:p>
-            <a:pPr algn="ctr"/>
-            <a:r>
-              <a:rPr lang="ko-KR" altLang="en-US" sz="1200" dirty="0">
-                <a:solidFill>
-                  <a:srgbClr val="5B6472"/>
-                </a:solidFill>
-                <a:latin typeface="맑은 고딕"/>
-                <a:ea typeface="맑은 고딕"/>
-                <a:cs typeface="맑은 고딕"/>
-              </a:rPr>
-              <a:t>· 표지에 적은 테스트 계정으로 실제 로그인되는 화면일 것</a:t>
-            </a:r>
-          </a:p>
-          <a:p>
-            <a:pPr algn="ctr"/>
-            <a:r>
-              <a:rPr lang="ko-KR" altLang="en-US" sz="800" dirty="0">
-                <a:solidFill>
-                  <a:srgbClr val="1A1D21"/>
-                </a:solidFill>
-                <a:latin typeface="맑은 고딕"/>
-                <a:ea typeface="맑은 고딕"/>
-                <a:cs typeface="맑은 고딕"/>
-              </a:rPr>
-              <a:t/>
-            </a:r>
-          </a:p>
-          <a:p>
-            <a:pPr algn="ctr"/>
-            <a:r>
-              <a:rPr lang="ko-KR" altLang="en-US" sz="1100" dirty="0">
-                <a:solidFill>
-                  <a:srgbClr val="5B6472"/>
-                </a:solidFill>
-                <a:latin typeface="맑은 고딕"/>
-                <a:ea typeface="맑은 고딕"/>
-                <a:cs typeface="맑은 고딕"/>
-              </a:rPr>
-              <a:t>공통 규칙 : 북마크바 숨김 · 주소창에 도메인 노출 · 작업표시줄 시계 함께</a:t>
-            </a:r>
-          </a:p>
-          <a:p>
-            <a:pPr algn="ctr"/>
-            <a:r>
-              <a:rPr lang="ko-KR" altLang="en-US" sz="1100" dirty="0">
-                <a:solidFill>
-                  <a:srgbClr val="5B6472"/>
-                </a:solidFill>
-                <a:latin typeface="맑은 고딕"/>
-                <a:ea typeface="맑은 고딕"/>
-                <a:cs typeface="맑은 고딕"/>
-              </a:rPr>
-              <a:t>파일 저장 위치 : docs/toss-review/shots/04_login.png</a:t>
-            </a:r>
-          </a:p>
-        </p:txBody>
-      </p:sp>
+      </p:pic>
     </p:spTree>
   </p:cSld>
   <p:clrMapOvr>
@@ -1402,148 +1049,35 @@
           </a:p>
         </p:txBody>
       </p:sp>
-      <p:sp>
-        <p:nvSpPr>
-          <p:cNvPr id="4" name="sp4"/>
-          <p:cNvSpPr txBox="1"/>
-          <p:nvPr/>
-        </p:nvSpPr>
-        <p:spPr>
-          <a:xfrm>
-            <a:off x="640080" y="1298448"/>
-            <a:ext cx="10908792" cy="5212080"/>
-          </a:xfrm>
-          <a:prstGeom prst="rect">
-            <a:avLst/>
-          </a:prstGeom>
-          <a:solidFill>
-            <a:srgbClr val="F3F5F8"/>
-          </a:solidFill>
-          <a:ln w="12700">
+      <p:pic>
+        <p:nvPicPr>
+          <p:cNvPr id="4" name="pic4"/>
+          <p:cNvPicPr>
+            <a:picLocks noChangeAspect="1"/>
+          </p:cNvPicPr>
+          <p:nvPr/>
+        </p:nvPicPr>
+        <p:blipFill>
+          <a:blip r:embed="rId2"/>
+          <a:stretch>
+            <a:fillRect/>
+          </a:stretch>
+        </p:blipFill>
+        <p:spPr>
+          <a:xfrm>
+            <a:off x="1461516" y="1298448"/>
+            <a:ext cx="9265920" cy="5212080"/>
+          </a:xfrm>
+          <a:prstGeom prst="rect">
+            <a:avLst/>
+          </a:prstGeom>
+          <a:ln w="9525">
             <a:solidFill>
               <a:srgbClr val="C9CED6"/>
             </a:solidFill>
           </a:ln>
         </p:spPr>
-        <p:txBody>
-          <a:bodyPr wrap="square" lIns="91440" tIns="91440" rIns="91440" bIns="91440" anchor="ctr">
-            <a:normAutofit/>
-          </a:bodyPr>
-          <a:lstStyle/>
-          <a:p>
-            <a:pPr algn="ctr"/>
-            <a:r>
-              <a:rPr lang="ko-KR" altLang="en-US" sz="2000" b="1" dirty="0">
-                <a:solidFill>
-                  <a:srgbClr val="D93B3B"/>
-                </a:solidFill>
-                <a:latin typeface="맑은 고딕"/>
-                <a:ea typeface="맑은 고딕"/>
-                <a:cs typeface="맑은 고딕"/>
-              </a:rPr>
-              <a:t>캡처 필요</a:t>
-            </a:r>
-          </a:p>
-          <a:p>
-            <a:pPr algn="ctr"/>
-            <a:r>
-              <a:rPr lang="ko-KR" altLang="en-US" sz="800" dirty="0">
-                <a:solidFill>
-                  <a:srgbClr val="1A1D21"/>
-                </a:solidFill>
-                <a:latin typeface="맑은 고딕"/>
-                <a:ea typeface="맑은 고딕"/>
-                <a:cs typeface="맑은 고딕"/>
-              </a:rPr>
-              <a:t/>
-            </a:r>
-          </a:p>
-          <a:p>
-            <a:pPr algn="ctr"/>
-            <a:r>
-              <a:rPr lang="ko-KR" altLang="en-US" sz="1300" dirty="0">
-                <a:solidFill>
-                  <a:srgbClr val="1A1D21"/>
-                </a:solidFill>
-                <a:latin typeface="맑은 고딕"/>
-                <a:ea typeface="맑은 고딕"/>
-                <a:cs typeface="맑은 고딕"/>
-              </a:rPr>
-              <a:t>주소 : https://www.youstudyinkorea.com/service</a:t>
-            </a:r>
-          </a:p>
-          <a:p>
-            <a:pPr algn="ctr"/>
-            <a:r>
-              <a:rPr lang="ko-KR" altLang="en-US" sz="600" dirty="0">
-                <a:solidFill>
-                  <a:srgbClr val="1A1D21"/>
-                </a:solidFill>
-                <a:latin typeface="맑은 고딕"/>
-                <a:ea typeface="맑은 고딕"/>
-                <a:cs typeface="맑은 고딕"/>
-              </a:rPr>
-              <a:t/>
-            </a:r>
-          </a:p>
-          <a:p>
-            <a:pPr algn="ctr"/>
-            <a:r>
-              <a:rPr lang="ko-KR" altLang="en-US" sz="1200" dirty="0">
-                <a:solidFill>
-                  <a:srgbClr val="5B6472"/>
-                </a:solidFill>
-                <a:latin typeface="맑은 고딕"/>
-                <a:ea typeface="맑은 고딕"/>
-                <a:cs typeface="맑은 고딕"/>
-              </a:rPr>
-              <a:t>· 금액이 '금액 준비 중'이 아니라 실제 숫자로 보일 것 (SQL 0050 실행 필요)</a:t>
-            </a:r>
-          </a:p>
-          <a:p>
-            <a:pPr algn="ctr"/>
-            <a:r>
-              <a:rPr lang="ko-KR" altLang="en-US" sz="800" dirty="0">
-                <a:solidFill>
-                  <a:srgbClr val="1A1D21"/>
-                </a:solidFill>
-                <a:latin typeface="맑은 고딕"/>
-                <a:ea typeface="맑은 고딕"/>
-                <a:cs typeface="맑은 고딕"/>
-              </a:rPr>
-              <a:t/>
-            </a:r>
-          </a:p>
-          <a:p>
-            <a:pPr algn="ctr"/>
-            <a:r>
-              <a:rPr lang="ko-KR" altLang="en-US" sz="1100" dirty="0">
-                <a:solidFill>
-                  <a:srgbClr val="5B6472"/>
-                </a:solidFill>
-                <a:latin typeface="맑은 고딕"/>
-                <a:ea typeface="맑은 고딕"/>
-                <a:cs typeface="맑은 고딕"/>
-              </a:rPr>
-              <a:t>공통 규칙 : 북마크바 숨김 · 주소창에 도메인 노출 · 작업표시줄 시계 함께</a:t>
-            </a:r>
-          </a:p>
-          <a:p>
-            <a:pPr algn="ctr"/>
-            <a:r>
-              <a:rPr lang="ko-KR" altLang="en-US" sz="1100" dirty="0">
-                <a:solidFill>
-                  <a:srgbClr val="5B6472"/>
-                </a:solidFill>
-                <a:latin typeface="맑은 고딕"/>
-                <a:ea typeface="맑은 고딕"/>
-                <a:cs typeface="맑은 고딕"/>
-              </a:rPr>
-              <a:t>파일 저장 위치 : docs/toss-review/shots/05a_products.png</a:t>
-            </a:r>
-          </a:p>
-        </p:txBody>
-      </p:sp>
+      </p:pic>
     </p:spTree>
   </p:cSld>
   <p:clrMapOvr>
@@ -1651,148 +1185,35 @@
           </a:p>
         </p:txBody>
       </p:sp>
-      <p:sp>
-        <p:nvSpPr>
-          <p:cNvPr id="4" name="sp4"/>
-          <p:cNvSpPr txBox="1"/>
-          <p:nvPr/>
-        </p:nvSpPr>
-        <p:spPr>
-          <a:xfrm>
-            <a:off x="640080" y="1298448"/>
-            <a:ext cx="10908792" cy="5212080"/>
-          </a:xfrm>
-          <a:prstGeom prst="rect">
-            <a:avLst/>
-          </a:prstGeom>
-          <a:solidFill>
-            <a:srgbClr val="F3F5F8"/>
-          </a:solidFill>
-          <a:ln w="12700">
+      <p:pic>
+        <p:nvPicPr>
+          <p:cNvPr id="4" name="pic4"/>
+          <p:cNvPicPr>
+            <a:picLocks noChangeAspect="1"/>
+          </p:cNvPicPr>
+          <p:nvPr/>
+        </p:nvPicPr>
+        <p:blipFill>
+          <a:blip r:embed="rId2"/>
+          <a:stretch>
+            <a:fillRect/>
+          </a:stretch>
+        </p:blipFill>
+        <p:spPr>
+          <a:xfrm>
+            <a:off x="1461516" y="1298448"/>
+            <a:ext cx="9265920" cy="5212080"/>
+          </a:xfrm>
+          <a:prstGeom prst="rect">
+            <a:avLst/>
+          </a:prstGeom>
+          <a:ln w="9525">
             <a:solidFill>
               <a:srgbClr val="C9CED6"/>
             </a:solidFill>
           </a:ln>
         </p:spPr>
-        <p:txBody>
-          <a:bodyPr wrap="square" lIns="91440" tIns="91440" rIns="91440" bIns="91440" anchor="ctr">
-            <a:normAutofit/>
-          </a:bodyPr>
-          <a:lstStyle/>
-          <a:p>
-            <a:pPr algn="ctr"/>
-            <a:r>
-              <a:rPr lang="ko-KR" altLang="en-US" sz="2000" b="1" dirty="0">
-                <a:solidFill>
-                  <a:srgbClr val="D93B3B"/>
-                </a:solidFill>
-                <a:latin typeface="맑은 고딕"/>
-                <a:ea typeface="맑은 고딕"/>
-                <a:cs typeface="맑은 고딕"/>
-              </a:rPr>
-              <a:t>캡처 필요</a:t>
-            </a:r>
-          </a:p>
-          <a:p>
-            <a:pPr algn="ctr"/>
-            <a:r>
-              <a:rPr lang="ko-KR" altLang="en-US" sz="800" dirty="0">
-                <a:solidFill>
-                  <a:srgbClr val="1A1D21"/>
-                </a:solidFill>
-                <a:latin typeface="맑은 고딕"/>
-                <a:ea typeface="맑은 고딕"/>
-                <a:cs typeface="맑은 고딕"/>
-              </a:rPr>
-              <a:t/>
-            </a:r>
-          </a:p>
-          <a:p>
-            <a:pPr algn="ctr"/>
-            <a:r>
-              <a:rPr lang="ko-KR" altLang="en-US" sz="1300" dirty="0">
-                <a:solidFill>
-                  <a:srgbClr val="1A1D21"/>
-                </a:solidFill>
-                <a:latin typeface="맑은 고딕"/>
-                <a:ea typeface="맑은 고딕"/>
-                <a:cs typeface="맑은 고딕"/>
-              </a:rPr>
-              <a:t>주소 : https://www.youstudyinkorea.com/service/full-consulting</a:t>
-            </a:r>
-          </a:p>
-          <a:p>
-            <a:pPr algn="ctr"/>
-            <a:r>
-              <a:rPr lang="ko-KR" altLang="en-US" sz="600" dirty="0">
-                <a:solidFill>
-                  <a:srgbClr val="1A1D21"/>
-                </a:solidFill>
-                <a:latin typeface="맑은 고딕"/>
-                <a:ea typeface="맑은 고딕"/>
-                <a:cs typeface="맑은 고딕"/>
-              </a:rPr>
-              <a:t/>
-            </a:r>
-          </a:p>
-          <a:p>
-            <a:pPr algn="ctr"/>
-            <a:r>
-              <a:rPr lang="ko-KR" altLang="en-US" sz="1200" dirty="0">
-                <a:solidFill>
-                  <a:srgbClr val="5B6472"/>
-                </a:solidFill>
-                <a:latin typeface="맑은 고딕"/>
-                <a:ea typeface="맑은 고딕"/>
-                <a:cs typeface="맑은 고딕"/>
-              </a:rPr>
-              <a:t>· 단건 최고가 상품(유학 준비 종합 컨설팅, 600,000원) 기준으로 캡처</a:t>
-            </a:r>
-          </a:p>
-          <a:p>
-            <a:pPr algn="ctr"/>
-            <a:r>
-              <a:rPr lang="ko-KR" altLang="en-US" sz="800" dirty="0">
-                <a:solidFill>
-                  <a:srgbClr val="1A1D21"/>
-                </a:solidFill>
-                <a:latin typeface="맑은 고딕"/>
-                <a:ea typeface="맑은 고딕"/>
-                <a:cs typeface="맑은 고딕"/>
-              </a:rPr>
-              <a:t/>
-            </a:r>
-          </a:p>
-          <a:p>
-            <a:pPr algn="ctr"/>
-            <a:r>
-              <a:rPr lang="ko-KR" altLang="en-US" sz="1100" dirty="0">
-                <a:solidFill>
-                  <a:srgbClr val="5B6472"/>
-                </a:solidFill>
-                <a:latin typeface="맑은 고딕"/>
-                <a:ea typeface="맑은 고딕"/>
-                <a:cs typeface="맑은 고딕"/>
-              </a:rPr>
-              <a:t>공통 규칙 : 북마크바 숨김 · 주소창에 도메인 노출 · 작업표시줄 시계 함께</a:t>
-            </a:r>
-          </a:p>
-          <a:p>
-            <a:pPr algn="ctr"/>
-            <a:r>
-              <a:rPr lang="ko-KR" altLang="en-US" sz="1100" dirty="0">
-                <a:solidFill>
-                  <a:srgbClr val="5B6472"/>
-                </a:solidFill>
-                <a:latin typeface="맑은 고딕"/>
-                <a:ea typeface="맑은 고딕"/>
-                <a:cs typeface="맑은 고딕"/>
-              </a:rPr>
-              <a:t>파일 저장 위치 : docs/toss-review/shots/05b_detail.png</a:t>
-            </a:r>
-          </a:p>
-        </p:txBody>
-      </p:sp>
+      </p:pic>
     </p:spTree>
   </p:cSld>
   <p:clrMapOvr>
@@ -1900,162 +1321,35 @@
           </a:p>
         </p:txBody>
       </p:sp>
-      <p:sp>
-        <p:nvSpPr>
-          <p:cNvPr id="4" name="sp4"/>
-          <p:cNvSpPr txBox="1"/>
-          <p:nvPr/>
-        </p:nvSpPr>
-        <p:spPr>
-          <a:xfrm>
-            <a:off x="640080" y="1298448"/>
-            <a:ext cx="10908792" cy="5212080"/>
-          </a:xfrm>
-          <a:prstGeom prst="rect">
-            <a:avLst/>
-          </a:prstGeom>
-          <a:solidFill>
-            <a:srgbClr val="F3F5F8"/>
-          </a:solidFill>
-          <a:ln w="12700">
+      <p:pic>
+        <p:nvPicPr>
+          <p:cNvPr id="4" name="pic4"/>
+          <p:cNvPicPr>
+            <a:picLocks noChangeAspect="1"/>
+          </p:cNvPicPr>
+          <p:nvPr/>
+        </p:nvPicPr>
+        <p:blipFill>
+          <a:blip r:embed="rId2"/>
+          <a:stretch>
+            <a:fillRect/>
+          </a:stretch>
+        </p:blipFill>
+        <p:spPr>
+          <a:xfrm>
+            <a:off x="1461516" y="1298448"/>
+            <a:ext cx="9265920" cy="5212080"/>
+          </a:xfrm>
+          <a:prstGeom prst="rect">
+            <a:avLst/>
+          </a:prstGeom>
+          <a:ln w="9525">
             <a:solidFill>
               <a:srgbClr val="C9CED6"/>
             </a:solidFill>
           </a:ln>
         </p:spPr>
-        <p:txBody>
-          <a:bodyPr wrap="square" lIns="91440" tIns="91440" rIns="91440" bIns="91440" anchor="ctr">
-            <a:normAutofit/>
-          </a:bodyPr>
-          <a:lstStyle/>
-          <a:p>
-            <a:pPr algn="ctr"/>
-            <a:r>
-              <a:rPr lang="ko-KR" altLang="en-US" sz="2000" b="1" dirty="0">
-                <a:solidFill>
-                  <a:srgbClr val="D93B3B"/>
-                </a:solidFill>
-                <a:latin typeface="맑은 고딕"/>
-                <a:ea typeface="맑은 고딕"/>
-                <a:cs typeface="맑은 고딕"/>
-              </a:rPr>
-              <a:t>캡처 필요</a:t>
-            </a:r>
-          </a:p>
-          <a:p>
-            <a:pPr algn="ctr"/>
-            <a:r>
-              <a:rPr lang="ko-KR" altLang="en-US" sz="800" dirty="0">
-                <a:solidFill>
-                  <a:srgbClr val="1A1D21"/>
-                </a:solidFill>
-                <a:latin typeface="맑은 고딕"/>
-                <a:ea typeface="맑은 고딕"/>
-                <a:cs typeface="맑은 고딕"/>
-              </a:rPr>
-              <a:t/>
-            </a:r>
-          </a:p>
-          <a:p>
-            <a:pPr algn="ctr"/>
-            <a:r>
-              <a:rPr lang="ko-KR" altLang="en-US" sz="1300" dirty="0">
-                <a:solidFill>
-                  <a:srgbClr val="1A1D21"/>
-                </a:solidFill>
-                <a:latin typeface="맑은 고딕"/>
-                <a:ea typeface="맑은 고딕"/>
-                <a:cs typeface="맑은 고딕"/>
-              </a:rPr>
-              <a:t>주소 : https://www.youstudyinkorea.com/student/order/full-consulting</a:t>
-            </a:r>
-          </a:p>
-          <a:p>
-            <a:pPr algn="ctr"/>
-            <a:r>
-              <a:rPr lang="ko-KR" altLang="en-US" sz="600" dirty="0">
-                <a:solidFill>
-                  <a:srgbClr val="1A1D21"/>
-                </a:solidFill>
-                <a:latin typeface="맑은 고딕"/>
-                <a:ea typeface="맑은 고딕"/>
-                <a:cs typeface="맑은 고딕"/>
-              </a:rPr>
-              <a:t/>
-            </a:r>
-          </a:p>
-          <a:p>
-            <a:pPr algn="ctr"/>
-            <a:r>
-              <a:rPr lang="ko-KR" altLang="en-US" sz="1200" dirty="0">
-                <a:solidFill>
-                  <a:srgbClr val="5B6472"/>
-                </a:solidFill>
-                <a:latin typeface="맑은 고딕"/>
-                <a:ea typeface="맑은 고딕"/>
-                <a:cs typeface="맑은 고딕"/>
-              </a:rPr>
-              <a:t>· 로그인 상태에서 접근</a:t>
-            </a:r>
-          </a:p>
-          <a:p>
-            <a:pPr algn="ctr"/>
-            <a:r>
-              <a:rPr lang="ko-KR" altLang="en-US" sz="1200" dirty="0">
-                <a:solidFill>
-                  <a:srgbClr val="5B6472"/>
-                </a:solidFill>
-                <a:latin typeface="맑은 고딕"/>
-                <a:ea typeface="맑은 고딕"/>
-                <a:cs typeface="맑은 고딕"/>
-              </a:rPr>
-              <a:t>· 결제수단(신용/체크카드) 선택 영역이 보일 것</a:t>
-            </a:r>
-          </a:p>
-          <a:p>
-            <a:pPr algn="ctr"/>
-            <a:r>
-              <a:rPr lang="ko-KR" altLang="en-US" sz="800" dirty="0">
-                <a:solidFill>
-                  <a:srgbClr val="1A1D21"/>
-                </a:solidFill>
-                <a:latin typeface="맑은 고딕"/>
-                <a:ea typeface="맑은 고딕"/>
-                <a:cs typeface="맑은 고딕"/>
-              </a:rPr>
-              <a:t/>
-            </a:r>
-          </a:p>
-          <a:p>
-            <a:pPr algn="ctr"/>
-            <a:r>
-              <a:rPr lang="ko-KR" altLang="en-US" sz="1100" dirty="0">
-                <a:solidFill>
-                  <a:srgbClr val="5B6472"/>
-                </a:solidFill>
-                <a:latin typeface="맑은 고딕"/>
-                <a:ea typeface="맑은 고딕"/>
-                <a:cs typeface="맑은 고딕"/>
-              </a:rPr>
-              <a:t>공통 규칙 : 북마크바 숨김 · 주소창에 도메인 노출 · 작업표시줄 시계 함께</a:t>
-            </a:r>
-          </a:p>
-          <a:p>
-            <a:pPr algn="ctr"/>
-            <a:r>
-              <a:rPr lang="ko-KR" altLang="en-US" sz="1100" dirty="0">
-                <a:solidFill>
-                  <a:srgbClr val="5B6472"/>
-                </a:solidFill>
-                <a:latin typeface="맑은 고딕"/>
-                <a:ea typeface="맑은 고딕"/>
-                <a:cs typeface="맑은 고딕"/>
-              </a:rPr>
-              <a:t>파일 저장 위치 : docs/toss-review/shots/05c_order.png</a:t>
-            </a:r>
-          </a:p>
-        </p:txBody>
-      </p:sp>
+      </p:pic>
     </p:spTree>
   </p:cSld>
   <p:clrMapOvr>
@@ -2163,162 +1457,35 @@
           </a:p>
         </p:txBody>
       </p:sp>
-      <p:sp>
-        <p:nvSpPr>
-          <p:cNvPr id="4" name="sp4"/>
-          <p:cNvSpPr txBox="1"/>
-          <p:nvPr/>
-        </p:nvSpPr>
-        <p:spPr>
-          <a:xfrm>
-            <a:off x="640080" y="1298448"/>
-            <a:ext cx="10908792" cy="5212080"/>
-          </a:xfrm>
-          <a:prstGeom prst="rect">
-            <a:avLst/>
-          </a:prstGeom>
-          <a:solidFill>
-            <a:srgbClr val="F3F5F8"/>
-          </a:solidFill>
-          <a:ln w="12700">
+      <p:pic>
+        <p:nvPicPr>
+          <p:cNvPr id="4" name="pic4"/>
+          <p:cNvPicPr>
+            <a:picLocks noChangeAspect="1"/>
+          </p:cNvPicPr>
+          <p:nvPr/>
+        </p:nvPicPr>
+        <p:blipFill>
+          <a:blip r:embed="rId2"/>
+          <a:stretch>
+            <a:fillRect/>
+          </a:stretch>
+        </p:blipFill>
+        <p:spPr>
+          <a:xfrm>
+            <a:off x="1461516" y="1298448"/>
+            <a:ext cx="9265920" cy="5212080"/>
+          </a:xfrm>
+          <a:prstGeom prst="rect">
+            <a:avLst/>
+          </a:prstGeom>
+          <a:ln w="9525">
             <a:solidFill>
               <a:srgbClr val="C9CED6"/>
             </a:solidFill>
           </a:ln>
         </p:spPr>
-        <p:txBody>
-          <a:bodyPr wrap="square" lIns="91440" tIns="91440" rIns="91440" bIns="91440" anchor="ctr">
-            <a:normAutofit/>
-          </a:bodyPr>
-          <a:lstStyle/>
-          <a:p>
-            <a:pPr algn="ctr"/>
-            <a:r>
-              <a:rPr lang="ko-KR" altLang="en-US" sz="2000" b="1" dirty="0">
-                <a:solidFill>
-                  <a:srgbClr val="D93B3B"/>
-                </a:solidFill>
-                <a:latin typeface="맑은 고딕"/>
-                <a:ea typeface="맑은 고딕"/>
-                <a:cs typeface="맑은 고딕"/>
-              </a:rPr>
-              <a:t>캡처 필요</a:t>
-            </a:r>
-          </a:p>
-          <a:p>
-            <a:pPr algn="ctr"/>
-            <a:r>
-              <a:rPr lang="ko-KR" altLang="en-US" sz="800" dirty="0">
-                <a:solidFill>
-                  <a:srgbClr val="1A1D21"/>
-                </a:solidFill>
-                <a:latin typeface="맑은 고딕"/>
-                <a:ea typeface="맑은 고딕"/>
-                <a:cs typeface="맑은 고딕"/>
-              </a:rPr>
-              <a:t/>
-            </a:r>
-          </a:p>
-          <a:p>
-            <a:pPr algn="ctr"/>
-            <a:r>
-              <a:rPr lang="ko-KR" altLang="en-US" sz="1300" dirty="0">
-                <a:solidFill>
-                  <a:srgbClr val="1A1D21"/>
-                </a:solidFill>
-                <a:latin typeface="맑은 고딕"/>
-                <a:ea typeface="맑은 고딕"/>
-                <a:cs typeface="맑은 고딕"/>
-              </a:rPr>
-              <a:t>주소 : 주문서 → [결제하기] → 토스 결제창</a:t>
-            </a:r>
-          </a:p>
-          <a:p>
-            <a:pPr algn="ctr"/>
-            <a:r>
-              <a:rPr lang="ko-KR" altLang="en-US" sz="600" dirty="0">
-                <a:solidFill>
-                  <a:srgbClr val="1A1D21"/>
-                </a:solidFill>
-                <a:latin typeface="맑은 고딕"/>
-                <a:ea typeface="맑은 고딕"/>
-                <a:cs typeface="맑은 고딕"/>
-              </a:rPr>
-              <a:t/>
-            </a:r>
-          </a:p>
-          <a:p>
-            <a:pPr algn="ctr"/>
-            <a:r>
-              <a:rPr lang="ko-KR" altLang="en-US" sz="1200" dirty="0">
-                <a:solidFill>
-                  <a:srgbClr val="5B6472"/>
-                </a:solidFill>
-                <a:latin typeface="맑은 고딕"/>
-                <a:ea typeface="맑은 고딕"/>
-                <a:cs typeface="맑은 고딕"/>
-              </a:rPr>
-              <a:t>· 결제창 안에 금액·상품명이 보일 것</a:t>
-            </a:r>
-          </a:p>
-          <a:p>
-            <a:pPr algn="ctr"/>
-            <a:r>
-              <a:rPr lang="ko-KR" altLang="en-US" sz="1200" dirty="0">
-                <a:solidFill>
-                  <a:srgbClr val="5B6472"/>
-                </a:solidFill>
-                <a:latin typeface="맑은 고딕"/>
-                <a:ea typeface="맑은 고딕"/>
-                <a:cs typeface="맑은 고딕"/>
-              </a:rPr>
-              <a:t>· 카드사 선택 + 약관 전체 동의 화면까지 캡처</a:t>
-            </a:r>
-          </a:p>
-          <a:p>
-            <a:pPr algn="ctr"/>
-            <a:r>
-              <a:rPr lang="ko-KR" altLang="en-US" sz="800" dirty="0">
-                <a:solidFill>
-                  <a:srgbClr val="1A1D21"/>
-                </a:solidFill>
-                <a:latin typeface="맑은 고딕"/>
-                <a:ea typeface="맑은 고딕"/>
-                <a:cs typeface="맑은 고딕"/>
-              </a:rPr>
-              <a:t/>
-            </a:r>
-          </a:p>
-          <a:p>
-            <a:pPr algn="ctr"/>
-            <a:r>
-              <a:rPr lang="ko-KR" altLang="en-US" sz="1100" dirty="0">
-                <a:solidFill>
-                  <a:srgbClr val="5B6472"/>
-                </a:solidFill>
-                <a:latin typeface="맑은 고딕"/>
-                <a:ea typeface="맑은 고딕"/>
-                <a:cs typeface="맑은 고딕"/>
-              </a:rPr>
-              <a:t>공통 규칙 : 북마크바 숨김 · 주소창에 도메인 노출 · 작업표시줄 시계 함께</a:t>
-            </a:r>
-          </a:p>
-          <a:p>
-            <a:pPr algn="ctr"/>
-            <a:r>
-              <a:rPr lang="ko-KR" altLang="en-US" sz="1100" dirty="0">
-                <a:solidFill>
-                  <a:srgbClr val="5B6472"/>
-                </a:solidFill>
-                <a:latin typeface="맑은 고딕"/>
-                <a:ea typeface="맑은 고딕"/>
-                <a:cs typeface="맑은 고딕"/>
-              </a:rPr>
-              <a:t>파일 저장 위치 : docs/toss-review/shots/06_payment.png</a:t>
-            </a:r>
-          </a:p>
-        </p:txBody>
-      </p:sp>
+      </p:pic>
     </p:spTree>
   </p:cSld>
   <p:clrMapOvr>
